--- a/Bemutato_rei_vizsga.pptx
+++ b/Bemutato_rei_vizsga.pptx
@@ -5023,7 +5023,7 @@
                 </a:solidFill>
                 <a:latin typeface="Calibri" pitchFamily="34" charset="0"/>
               </a:rPr>
-              <a:t>Az App.jsx gyökere BrowserRouter-rel van koruleveve</a:t>
+              <a:t>Az App.jsx gyökere BrowserRouter-rel van körülvéve</a:t>
             </a:r>
           </a:p>
           <a:p>
@@ -5037,7 +5037,7 @@
                 </a:solidFill>
                 <a:latin typeface="Calibri" pitchFamily="34" charset="0"/>
               </a:rPr>
-              <a:t>HTML5 history API-ra epulo oldalsuti navigacio</a:t>
+              <a:t>HTML5 history API-ra épülő oldalszintű navigáció</a:t>
             </a:r>
           </a:p>
           <a:p>
@@ -5051,7 +5051,7 @@
                 </a:solidFill>
                 <a:latin typeface="Calibri" pitchFamily="34" charset="0"/>
               </a:rPr>
-              <a:t>Oldal ujratoltes nelkul navigal az utvonalak kozott</a:t>
+              <a:t>Oldal ujratöltés nélkül navigál az útvonalak között</a:t>
             </a:r>
           </a:p>
           <a:p>
@@ -5358,7 +5358,7 @@
                 </a:solidFill>
                 <a:latin typeface="Trebuchet MS" pitchFamily="34" charset="0"/>
               </a:rPr>
-              <a:t>Vedett utvonalak</a:t>
+              <a:t>Védett utvonalak</a:t>
             </a:r>
           </a:p>
         </p:txBody>
@@ -5391,7 +5391,7 @@
                 </a:solidFill>
                 <a:latin typeface="Calibri" pitchFamily="34" charset="0"/>
               </a:rPr>
-              <a:t>Admin panel csak /admin uton erheto el</a:t>
+              <a:t>Admin panel csak /admin uton érheto el</a:t>
             </a:r>
           </a:p>
           <a:p>
@@ -5405,7 +5405,7 @@
                 </a:solidFill>
                 <a:latin typeface="Calibri" pitchFamily="34" charset="0"/>
               </a:rPr>
-              <a:t>Kosar</a:t>
+              <a:t>Kosár</a:t>
             </a:r>
           </a:p>
           <a:p>
@@ -5427,7 +5427,7 @@
                 </a:solidFill>
                 <a:latin typeface="Calibri" pitchFamily="34" charset="0"/>
               </a:rPr>
-              <a:t>rendelesek: auth szukseges (token ellenorzes useAuth()-on keresztul)</a:t>
+              <a:t>rendelések: auth szükséges (token ellenőrzés useAuth()-on keresztül)</a:t>
             </a:r>
           </a:p>
           <a:p>
@@ -5441,7 +5441,7 @@
                 </a:solidFill>
                 <a:latin typeface="Calibri" pitchFamily="34" charset="0"/>
               </a:rPr>
-              <a:t>Header/Footer nelkuli admin layout – kulon Route ag</a:t>
+              <a:t>Header/Footer nélküli admin layout – külön Route ág</a:t>
             </a:r>
           </a:p>
         </p:txBody>
@@ -14929,7 +14929,7 @@
                 </a:solidFill>
                 <a:latin typeface="Calibri" pitchFamily="34" charset="0"/>
               </a:rPr>
-              <a:t>Allapot:</a:t>
+              <a:t>Állapot:</a:t>
             </a:r>
             <a:r>
               <a:rPr lang="hu-HU" sz="2200" dirty="0">
@@ -14952,7 +14952,7 @@
                 </a:solidFill>
                 <a:latin typeface="Calibri" pitchFamily="34" charset="0"/>
               </a:rPr>
-              <a:t>Fuggvenyei:</a:t>
+              <a:t>Függvényei:</a:t>
             </a:r>
             <a:r>
               <a:rPr lang="hu-HU" sz="2200" dirty="0">
@@ -14997,7 +14997,7 @@
                 </a:solidFill>
                 <a:latin typeface="Calibri" pitchFamily="34" charset="0"/>
               </a:rPr>
-              <a:t>Tarolas:</a:t>
+              <a:t>Tárolás:</a:t>
             </a:r>
             <a:r>
               <a:rPr lang="hu-HU" sz="2200" dirty="0">
@@ -15168,7 +15168,7 @@
                 </a:solidFill>
                 <a:latin typeface="Calibri" pitchFamily="34" charset="0"/>
               </a:rPr>
-              <a:t> kosar allapotat kezeli globálisan</a:t>
+              <a:t> kosár állapotát kezeli globálisan</a:t>
             </a:r>
           </a:p>
           <a:p>
@@ -15182,7 +15182,7 @@
                 </a:solidFill>
                 <a:latin typeface="Calibri" pitchFamily="34" charset="0"/>
               </a:rPr>
-              <a:t>Allapot:</a:t>
+              <a:t>Állapot:</a:t>
             </a:r>
             <a:r>
               <a:rPr lang="hu-HU" sz="2200" dirty="0">
@@ -15205,7 +15205,7 @@
                 </a:solidFill>
                 <a:latin typeface="Calibri" pitchFamily="34" charset="0"/>
               </a:rPr>
-              <a:t>Fuggvenyei:</a:t>
+              <a:t>Függvényei:</a:t>
             </a:r>
             <a:r>
               <a:rPr lang="hu-HU" sz="2200" dirty="0">
@@ -15228,7 +15228,7 @@
                 </a:solidFill>
                 <a:latin typeface="Calibri" pitchFamily="34" charset="0"/>
               </a:rPr>
-              <a:t>Fueggoseg:</a:t>
+              <a:t>Függőség:</a:t>
             </a:r>
             <a:r>
               <a:rPr lang="hu-HU" sz="2200" dirty="0">
